--- a/yunqi-2026-agenda-201/docs/洞察一页-03-驾驭百万级 Agent：Sandbox 核心能力与千问办.pptx
+++ b/yunqi-2026-agenda-201/docs/洞察一页-03-驾驭百万级 Agent：Sandbox 核心能力与千问办.pptx
@@ -3141,7 +3141,7 @@
         <p:spPr>
           <a:xfrm>
             <a:off x="0" y="0"/>
-            <a:ext cx="12191695" cy="1051560"/>
+            <a:ext cx="12191695" cy="1097280"/>
           </a:xfrm>
           <a:prstGeom prst="rect">
             <a:avLst/>
@@ -3183,8 +3183,8 @@
         </p:nvSpPr>
         <p:spPr>
           <a:xfrm>
-            <a:off x="365760" y="146304"/>
-            <a:ext cx="11430000" cy="274320"/>
+            <a:off x="320040" y="91440"/>
+            <a:ext cx="11521440" cy="237744"/>
           </a:xfrm>
           <a:prstGeom prst="rect">
             <a:avLst/>
@@ -3199,7 +3199,7 @@
           <a:p>
             <a:pPr algn="l"/>
             <a:r>
-              <a:rPr sz="1300" b="0">
+              <a:rPr sz="1200" b="0">
                 <a:solidFill>
                   <a:srgbClr val="6B6B6B"/>
                 </a:solidFill>
@@ -3219,8 +3219,8 @@
         </p:nvSpPr>
         <p:spPr>
           <a:xfrm>
-            <a:off x="365760" y="420624"/>
-            <a:ext cx="11430000" cy="502920"/>
+            <a:off x="320040" y="347472"/>
+            <a:ext cx="11521440" cy="658368"/>
           </a:xfrm>
           <a:prstGeom prst="rect">
             <a:avLst/>
@@ -3235,14 +3235,14 @@
           <a:p>
             <a:pPr algn="l"/>
             <a:r>
-              <a:rPr sz="2000" b="1">
+              <a:rPr sz="1600" b="1">
                 <a:solidFill>
                   <a:srgbClr val="1A1A1A"/>
                 </a:solidFill>
                 <a:latin typeface="Microsoft YaHei"/>
                 <a:ea typeface="Microsoft YaHei"/>
               </a:rPr>
-              <a:t>洞察：按 Use/In/RL 三类负载设计沙箱规格、休眠策略与计费，是支撑百万至千万级办公 Agen…</a:t>
+              <a:t>洞察：按 Use/In/RL 三类负载设计沙箱规格、休眠策略与计费，是支撑百万至千万级办公 Agent 的前提。</a:t>
             </a:r>
           </a:p>
         </p:txBody>
@@ -3255,8 +3255,8 @@
         </p:nvSpPr>
         <p:spPr>
           <a:xfrm>
-            <a:off x="320040" y="1207008"/>
-            <a:ext cx="11521440" cy="502920"/>
+            <a:off x="274320" y="1207008"/>
+            <a:ext cx="11612880" cy="749808"/>
           </a:xfrm>
           <a:prstGeom prst="rect">
             <a:avLst/>
@@ -3300,8 +3300,8 @@
         </p:nvSpPr>
         <p:spPr>
           <a:xfrm>
-            <a:off x="457200" y="1298448"/>
-            <a:ext cx="11247120" cy="365760"/>
+            <a:off x="411480" y="1261872"/>
+            <a:ext cx="11338560" cy="640080"/>
           </a:xfrm>
           <a:prstGeom prst="rect">
             <a:avLst/>
@@ -3316,14 +3316,14 @@
           <a:p>
             <a:pPr algn="l"/>
             <a:r>
-              <a:rPr sz="1300" b="1">
+              <a:rPr sz="1200" b="1">
                 <a:solidFill>
                   <a:srgbClr val="1A1A1A"/>
                 </a:solidFill>
                 <a:latin typeface="Microsoft YaHei"/>
                 <a:ea typeface="Microsoft YaHei"/>
               </a:rPr>
-              <a:t>一句话判断：本场前半由卢萌凯拆解 Agent Sandbox 三类核心负载（Use 短生命周期工具、In 长会话分身、RL/Eval 十万级并发）及极速版架构：E2B 兼容、MicroVM 六维隔离、浅/深休眠与快照降本、多级缓存…</a:t>
+              <a:t>一句话判断：本场前半由卢萌凯拆解 Agent Sandbox 三类核心负载（Use 短生命周期工具、In 长会话分身、RL/Eval 十万级并发）及极速版架构：E2B 兼容、MicroVM 六维隔离、浅/深休眠与快照降本、多级缓存冲击百万级并发。</a:t>
             </a:r>
           </a:p>
         </p:txBody>
@@ -3336,8 +3336,8 @@
         </p:nvSpPr>
         <p:spPr>
           <a:xfrm>
-            <a:off x="320040" y="1874519"/>
-            <a:ext cx="3703320" cy="2606040"/>
+            <a:off x="274320" y="2084831"/>
+            <a:ext cx="3749039" cy="2267712"/>
           </a:xfrm>
           <a:prstGeom prst="rect">
             <a:avLst/>
@@ -3381,8 +3381,8 @@
         </p:nvSpPr>
         <p:spPr>
           <a:xfrm>
-            <a:off x="457200" y="2011679"/>
-            <a:ext cx="3429000" cy="320040"/>
+            <a:off x="402336" y="2176271"/>
+            <a:ext cx="3493007" cy="292608"/>
           </a:xfrm>
           <a:prstGeom prst="rect">
             <a:avLst/>
@@ -3397,14 +3397,14 @@
           <a:p>
             <a:pPr algn="l"/>
             <a:r>
-              <a:rPr sz="1500" b="1">
+              <a:rPr sz="1400" b="1">
                 <a:solidFill>
                   <a:srgbClr val="8B1A2B"/>
                 </a:solidFill>
                 <a:latin typeface="Microsoft YaHei"/>
                 <a:ea typeface="Microsoft YaHei"/>
               </a:rPr>
-              <a:t>01  三类 Sandbox 负载画像…</a:t>
+              <a:t>01  三类 Sandbox 负载画像与指标短板</a:t>
             </a:r>
           </a:p>
         </p:txBody>
@@ -3417,8 +3417,8 @@
         </p:nvSpPr>
         <p:spPr>
           <a:xfrm>
-            <a:off x="484632" y="2377439"/>
-            <a:ext cx="3374136" cy="1965960"/>
+            <a:off x="402336" y="2487167"/>
+            <a:ext cx="3493007" cy="1764792"/>
           </a:xfrm>
           <a:prstGeom prst="rect">
             <a:avLst/>
@@ -3433,52 +3433,69 @@
           <a:p>
             <a:pPr algn="l">
               <a:spcAft>
-                <a:spcPts val="400"/>
+                <a:spcPts val="200"/>
               </a:spcAft>
             </a:pPr>
             <a:r>
-              <a:rPr sz="1200" b="1">
+              <a:rPr sz="1100" b="1">
                 <a:solidFill>
                   <a:srgbClr val="1A1A1A"/>
                 </a:solidFill>
                 <a:latin typeface="Microsoft YaHei"/>
                 <a:ea typeface="Microsoft YaHei"/>
               </a:rPr>
-              <a:t>Agent Use：Code Interpreter、Browser/Comput…</a:t>
+              <a:t>HCS 沙箱产品应按三类负载定义不同规格与计费（瞬时工具型、长会话休眠型、评测高并发型），避免一套 Pod 规格打天下</a:t>
             </a:r>
           </a:p>
           <a:p>
             <a:pPr algn="l">
               <a:spcAft>
-                <a:spcPts val="400"/>
+                <a:spcPts val="200"/>
               </a:spcAft>
             </a:pPr>
             <a:r>
-              <a:rPr sz="1200" b="0">
+              <a:rPr sz="1100" b="0">
                 <a:solidFill>
                   <a:srgbClr val="4A4A4A"/>
                 </a:solidFill>
                 <a:latin typeface="Microsoft YaHei"/>
                 <a:ea typeface="Microsoft YaHei"/>
               </a:rPr>
-              <a:t>• Agent In：Coding Agent、长任务、数字分身、个人助手、多智能体协同；长生命周期、强状态依赖、低活跃利用率，要求会话亲…</a:t>
+              <a:t>• Agent Use：Code Interpreter、Browser/Computer Use、MCP Server、Skills Sand箱</a:t>
             </a:r>
           </a:p>
           <a:p>
             <a:pPr algn="l">
               <a:spcAft>
-                <a:spcPts val="400"/>
+                <a:spcPts val="200"/>
               </a:spcAft>
             </a:pPr>
             <a:r>
-              <a:rPr sz="1200" b="0">
+              <a:rPr sz="1100" b="0">
                 <a:solidFill>
                   <a:srgbClr val="4A4A4A"/>
                 </a:solidFill>
                 <a:latin typeface="Microsoft YaHei"/>
                 <a:ea typeface="Microsoft YaHei"/>
               </a:rPr>
-              <a:t>• Agent RL/Eval：SWE-bench、OSWorld、Computer Use 评测；批量 Rollout/重置/Fork/…</a:t>
+              <a:t>• Agent In：Coding Agent、长任务、数字分身、个人助手、多智能体协同</a:t>
+            </a:r>
+          </a:p>
+          <a:p>
+            <a:pPr algn="l">
+              <a:spcAft>
+                <a:spcPts val="200"/>
+              </a:spcAft>
+            </a:pPr>
+            <a:r>
+              <a:rPr sz="1100" b="0">
+                <a:solidFill>
+                  <a:srgbClr val="4A4A4A"/>
+                </a:solidFill>
+                <a:latin typeface="Microsoft YaHei"/>
+                <a:ea typeface="Microsoft YaHei"/>
+              </a:rPr>
+              <a:t>• Agent RL/Eval：SWE-bench、OSWorld、Computer Use 评测</a:t>
             </a:r>
           </a:p>
         </p:txBody>
@@ -3491,8 +3508,8 @@
         </p:nvSpPr>
         <p:spPr>
           <a:xfrm>
-            <a:off x="4224528" y="1874519"/>
-            <a:ext cx="3703320" cy="2606040"/>
+            <a:off x="4187951" y="2084831"/>
+            <a:ext cx="3749039" cy="2267712"/>
           </a:xfrm>
           <a:prstGeom prst="rect">
             <a:avLst/>
@@ -3536,8 +3553,8 @@
         </p:nvSpPr>
         <p:spPr>
           <a:xfrm>
-            <a:off x="4361688" y="2011679"/>
-            <a:ext cx="3429000" cy="320040"/>
+            <a:off x="4315967" y="2176271"/>
+            <a:ext cx="3493007" cy="292608"/>
           </a:xfrm>
           <a:prstGeom prst="rect">
             <a:avLst/>
@@ -3552,14 +3569,14 @@
           <a:p>
             <a:pPr algn="l"/>
             <a:r>
-              <a:rPr sz="1500" b="1">
+              <a:rPr sz="1400" b="1">
                 <a:solidFill>
                   <a:srgbClr val="8B1A2B"/>
                 </a:solidFill>
                 <a:latin typeface="Microsoft YaHei"/>
                 <a:ea typeface="Microsoft YaHei"/>
               </a:rPr>
-              <a:t>02  极速版架构：E2B 兼容与增强…</a:t>
+              <a:t>02  E2B 兼容与增强运行时</a:t>
             </a:r>
           </a:p>
         </p:txBody>
@@ -3572,8 +3589,8 @@
         </p:nvSpPr>
         <p:spPr>
           <a:xfrm>
-            <a:off x="4389120" y="2377439"/>
-            <a:ext cx="3374136" cy="1965960"/>
+            <a:off x="4315967" y="2487167"/>
+            <a:ext cx="3493007" cy="1764792"/>
           </a:xfrm>
           <a:prstGeom prst="rect">
             <a:avLst/>
@@ -3588,52 +3605,69 @@
           <a:p>
             <a:pPr algn="l">
               <a:spcAft>
-                <a:spcPts val="400"/>
+                <a:spcPts val="200"/>
               </a:spcAft>
             </a:pPr>
             <a:r>
-              <a:rPr sz="1200" b="1">
+              <a:rPr sz="1100" b="1">
                 <a:solidFill>
                   <a:srgbClr val="1A1A1A"/>
                 </a:solidFill>
                 <a:latin typeface="Microsoft YaHei"/>
                 <a:ea typeface="Microsoft YaHei"/>
               </a:rPr>
-              <a:t>生态接入：E2B SDK 原生、OpenAPI、MCP/CLI Agent 友好工…</a:t>
+              <a:t>对标建设时优先保证 E2B API 语义兼容与 MCP 工具入口，再叠加专属云增强（VPC 出站、企业身份、审计）</a:t>
             </a:r>
           </a:p>
           <a:p>
             <a:pPr algn="l">
               <a:spcAft>
-                <a:spcPts val="400"/>
+                <a:spcPts val="200"/>
               </a:spcAft>
             </a:pPr>
             <a:r>
-              <a:rPr sz="1200" b="0">
+              <a:rPr sz="1100" b="0">
                 <a:solidFill>
                   <a:srgbClr val="4A4A4A"/>
                 </a:solidFill>
                 <a:latin typeface="Microsoft YaHei"/>
                 <a:ea typeface="Microsoft YaHei"/>
               </a:rPr>
-              <a:t>• 统一生命周期语义的 OpenAPI/SDK；运行时为安全隔离 MicroVM，内置 E2B Native + 云原生增强。</a:t>
+              <a:t>• 生态接入：E2B SDK 原生、OpenAPI、MCP/CLI Agent 友好工具。</a:t>
             </a:r>
           </a:p>
           <a:p>
             <a:pPr algn="l">
               <a:spcAft>
-                <a:spcPts val="400"/>
+                <a:spcPts val="200"/>
               </a:spcAft>
             </a:pPr>
             <a:r>
-              <a:rPr sz="1200" b="0">
+              <a:rPr sz="1100" b="0">
                 <a:solidFill>
                   <a:srgbClr val="4A4A4A"/>
                 </a:solidFill>
                 <a:latin typeface="Microsoft YaHei"/>
                 <a:ea typeface="Microsoft YaHei"/>
               </a:rPr>
-              <a:t>• 增强项：差异化 QoS、深/浅休眠与快照；用户/目录级动态存储挂载；VPC 与 L4/L7 黑白名单；Agent Identity +…</a:t>
+              <a:t>• 统一生命周期语义的 OpenAPI/SDK</a:t>
+            </a:r>
+          </a:p>
+          <a:p>
+            <a:pPr algn="l">
+              <a:spcAft>
+                <a:spcPts val="200"/>
+              </a:spcAft>
+            </a:pPr>
+            <a:r>
+              <a:rPr sz="1100" b="0">
+                <a:solidFill>
+                  <a:srgbClr val="4A4A4A"/>
+                </a:solidFill>
+                <a:latin typeface="Microsoft YaHei"/>
+                <a:ea typeface="Microsoft YaHei"/>
+              </a:rPr>
+              <a:t>• 增强项：差异化 QoS、深/浅休眠与快照</a:t>
             </a:r>
           </a:p>
         </p:txBody>
@@ -3646,8 +3680,8 @@
         </p:nvSpPr>
         <p:spPr>
           <a:xfrm>
-            <a:off x="8129016" y="1874519"/>
-            <a:ext cx="3703320" cy="2606040"/>
+            <a:off x="8101582" y="2084831"/>
+            <a:ext cx="3749039" cy="2267712"/>
           </a:xfrm>
           <a:prstGeom prst="rect">
             <a:avLst/>
@@ -3691,8 +3725,8 @@
         </p:nvSpPr>
         <p:spPr>
           <a:xfrm>
-            <a:off x="8266176" y="2011679"/>
-            <a:ext cx="3429000" cy="320040"/>
+            <a:off x="8229598" y="2176271"/>
+            <a:ext cx="3493007" cy="292608"/>
           </a:xfrm>
           <a:prstGeom prst="rect">
             <a:avLst/>
@@ -3707,14 +3741,14 @@
           <a:p>
             <a:pPr algn="l"/>
             <a:r>
-              <a:rPr sz="1500" b="1">
+              <a:rPr sz="1400" b="1">
                 <a:solidFill>
                   <a:srgbClr val="8B1A2B"/>
                 </a:solidFill>
                 <a:latin typeface="Microsoft YaHei"/>
                 <a:ea typeface="Microsoft YaHei"/>
               </a:rPr>
-              <a:t>03  生产可用前提：六维安全隔离</a:t>
+              <a:t>03  六维安全隔离</a:t>
             </a:r>
           </a:p>
         </p:txBody>
@@ -3727,8 +3761,8 @@
         </p:nvSpPr>
         <p:spPr>
           <a:xfrm>
-            <a:off x="8293608" y="2377439"/>
-            <a:ext cx="3374136" cy="1965960"/>
+            <a:off x="8229598" y="2487167"/>
+            <a:ext cx="3493007" cy="1764792"/>
           </a:xfrm>
           <a:prstGeom prst="rect">
             <a:avLst/>
@@ -3743,35 +3777,52 @@
           <a:p>
             <a:pPr algn="l">
               <a:spcAft>
-                <a:spcPts val="400"/>
+                <a:spcPts val="200"/>
               </a:spcAft>
             </a:pPr>
             <a:r>
-              <a:rPr sz="1200" b="1">
+              <a:rPr sz="1100" b="1">
                 <a:solidFill>
                   <a:srgbClr val="1A1A1A"/>
                 </a:solidFill>
                 <a:latin typeface="Microsoft YaHei"/>
                 <a:ea typeface="Microsoft YaHei"/>
               </a:rPr>
-              <a:t>风险画像：恶意代码执行、敏感数据泄露、沙箱逃逸、身份冒用/越权、多租户交叉污染。</a:t>
+              <a:t>专属云安全基线应把「默认无出站 + STS 短票 + 会话销毁零残留 + MicroVM」写成 Agent 沙箱强制策略</a:t>
             </a:r>
           </a:p>
           <a:p>
             <a:pPr algn="l">
               <a:spcAft>
-                <a:spcPts val="400"/>
+                <a:spcPts val="200"/>
               </a:spcAft>
             </a:pPr>
             <a:r>
-              <a:rPr sz="1200" b="0">
+              <a:rPr sz="1100" b="0">
                 <a:solidFill>
                   <a:srgbClr val="4A4A4A"/>
                 </a:solidFill>
                 <a:latin typeface="Microsoft YaHei"/>
                 <a:ea typeface="Microsoft YaHei"/>
               </a:rPr>
-              <a:t>• 方案：MicroVM 运行环境隔离；一实例一会话结束即毁；函数级权限与短时 STS/可轮换 token；会话动态挂载持久存储、销毁零残…</a:t>
+              <a:t>• 风险画像：恶意代码执行、敏感数据泄露、沙箱逃逸、身份冒用/越权、多租户交叉污染。</a:t>
+            </a:r>
+          </a:p>
+          <a:p>
+            <a:pPr algn="l">
+              <a:spcAft>
+                <a:spcPts val="200"/>
+              </a:spcAft>
+            </a:pPr>
+            <a:r>
+              <a:rPr sz="1100" b="0">
+                <a:solidFill>
+                  <a:srgbClr val="4A4A4A"/>
+                </a:solidFill>
+                <a:latin typeface="Microsoft YaHei"/>
+                <a:ea typeface="Microsoft YaHei"/>
+              </a:rPr>
+              <a:t>• 方案：MicroVM 运行环境隔离</a:t>
             </a:r>
           </a:p>
         </p:txBody>
@@ -3784,8 +3835,8 @@
         </p:nvSpPr>
         <p:spPr>
           <a:xfrm>
-            <a:off x="320040" y="4617720"/>
-            <a:ext cx="7315200" cy="256032"/>
+            <a:off x="274320" y="4553712"/>
+            <a:ext cx="7315200" cy="237744"/>
           </a:xfrm>
           <a:prstGeom prst="rect">
             <a:avLst/>
@@ -3800,7 +3851,7 @@
           <a:p>
             <a:pPr algn="l"/>
             <a:r>
-              <a:rPr sz="1400" b="1">
+              <a:rPr sz="1300" b="1">
                 <a:solidFill>
                   <a:srgbClr val="1A1A1A"/>
                 </a:solidFill>
@@ -3820,8 +3871,8 @@
         </p:nvSpPr>
         <p:spPr>
           <a:xfrm>
-            <a:off x="320040" y="4910328"/>
-            <a:ext cx="1847088" cy="868680"/>
+            <a:off x="274320" y="4809744"/>
+            <a:ext cx="1874519" cy="960120"/>
           </a:xfrm>
           <a:prstGeom prst="rect">
             <a:avLst/>
@@ -3865,8 +3916,8 @@
         </p:nvSpPr>
         <p:spPr>
           <a:xfrm>
-            <a:off x="429768" y="4965192"/>
-            <a:ext cx="1664208" cy="201168"/>
+            <a:off x="365760" y="4864608"/>
+            <a:ext cx="1709927" cy="201168"/>
           </a:xfrm>
           <a:prstGeom prst="rect">
             <a:avLst/>
@@ -3888,7 +3939,7 @@
                 <a:latin typeface="Microsoft YaHei"/>
                 <a:ea typeface="Microsoft YaHei"/>
               </a:rPr>
-              <a:t>三类 Sandbox …</a:t>
+              <a:t>关键指标</a:t>
             </a:r>
           </a:p>
         </p:txBody>
@@ -3901,8 +3952,8 @@
         </p:nvSpPr>
         <p:spPr>
           <a:xfrm>
-            <a:off x="429768" y="5166360"/>
-            <a:ext cx="1664208" cy="237744"/>
+            <a:off x="365760" y="5065776"/>
+            <a:ext cx="1709927" cy="256032"/>
           </a:xfrm>
           <a:prstGeom prst="rect">
             <a:avLst/>
@@ -3924,7 +3975,7 @@
                 <a:latin typeface="Microsoft YaHei"/>
                 <a:ea typeface="Microsoft YaHei"/>
               </a:rPr>
-              <a:t>结论：任一短板都会成为企业 A…</a:t>
+              <a:t>演讲口径</a:t>
             </a:r>
           </a:p>
         </p:txBody>
@@ -3937,8 +3988,8 @@
         </p:nvSpPr>
         <p:spPr>
           <a:xfrm>
-            <a:off x="429768" y="5413248"/>
-            <a:ext cx="1664208" cy="292608"/>
+            <a:off x="365760" y="5340096"/>
+            <a:ext cx="1709927" cy="365760"/>
           </a:xfrm>
           <a:prstGeom prst="rect">
             <a:avLst/>
@@ -3953,14 +4004,14 @@
           <a:p>
             <a:pPr algn="l"/>
             <a:r>
-              <a:rPr sz="1400" b="1">
+              <a:rPr sz="1200" b="1">
                 <a:solidFill>
                   <a:srgbClr val="8B1A2B"/>
                 </a:solidFill>
                 <a:latin typeface="Microsoft YaHei"/>
                 <a:ea typeface="Microsoft YaHei"/>
               </a:rPr>
-              <a:t>结论：任一短板都会成为企业 Age…</a:t>
+              <a:t>创建速度、并发容量、状态保活/恢复、强隔离、单位成本</a:t>
             </a:r>
           </a:p>
         </p:txBody>
@@ -3973,8 +4024,8 @@
         </p:nvSpPr>
         <p:spPr>
           <a:xfrm>
-            <a:off x="2276856" y="4910328"/>
-            <a:ext cx="1847088" cy="868680"/>
+            <a:off x="2240279" y="4809744"/>
+            <a:ext cx="1874519" cy="960120"/>
           </a:xfrm>
           <a:prstGeom prst="rect">
             <a:avLst/>
@@ -4018,8 +4069,8 @@
         </p:nvSpPr>
         <p:spPr>
           <a:xfrm>
-            <a:off x="2386584" y="4965192"/>
-            <a:ext cx="1664208" cy="201168"/>
+            <a:off x="2331719" y="4864608"/>
+            <a:ext cx="1709927" cy="201168"/>
           </a:xfrm>
           <a:prstGeom prst="rect">
             <a:avLst/>
@@ -4041,7 +4092,7 @@
                 <a:latin typeface="Microsoft YaHei"/>
                 <a:ea typeface="Microsoft YaHei"/>
               </a:rPr>
-              <a:t>极速版架构：E2B 兼…</a:t>
+              <a:t>结论</a:t>
             </a:r>
           </a:p>
         </p:txBody>
@@ -4054,8 +4105,8 @@
         </p:nvSpPr>
         <p:spPr>
           <a:xfrm>
-            <a:off x="2386584" y="5166360"/>
-            <a:ext cx="1664208" cy="237744"/>
+            <a:off x="2331719" y="5065776"/>
+            <a:ext cx="1709927" cy="256032"/>
           </a:xfrm>
           <a:prstGeom prst="rect">
             <a:avLst/>
@@ -4077,7 +4128,7 @@
                 <a:latin typeface="Microsoft YaHei"/>
                 <a:ea typeface="Microsoft YaHei"/>
               </a:rPr>
-              <a:t>生态：E2B SDK / Op…</a:t>
+              <a:t>演讲口径</a:t>
             </a:r>
           </a:p>
         </p:txBody>
@@ -4090,8 +4141,8 @@
         </p:nvSpPr>
         <p:spPr>
           <a:xfrm>
-            <a:off x="2386584" y="5413248"/>
-            <a:ext cx="1664208" cy="292608"/>
+            <a:off x="2331719" y="5340096"/>
+            <a:ext cx="1709927" cy="365760"/>
           </a:xfrm>
           <a:prstGeom prst="rect">
             <a:avLst/>
@@ -4106,14 +4157,14 @@
           <a:p>
             <a:pPr algn="l"/>
             <a:r>
-              <a:rPr sz="1400" b="1">
+              <a:rPr sz="1200" b="1">
                 <a:solidFill>
                   <a:srgbClr val="8B1A2B"/>
                 </a:solidFill>
                 <a:latin typeface="Microsoft YaHei"/>
                 <a:ea typeface="Microsoft YaHei"/>
               </a:rPr>
-              <a:t>生态：E2B SDK / Open…</a:t>
+              <a:t>任一短板都会成为企业 Agent 平台规模化瓶颈</a:t>
             </a:r>
           </a:p>
         </p:txBody>
@@ -4126,8 +4177,8 @@
         </p:nvSpPr>
         <p:spPr>
           <a:xfrm>
-            <a:off x="4233672" y="4910328"/>
-            <a:ext cx="1847088" cy="868680"/>
+            <a:off x="4206238" y="4809744"/>
+            <a:ext cx="1874519" cy="960120"/>
           </a:xfrm>
           <a:prstGeom prst="rect">
             <a:avLst/>
@@ -4171,8 +4222,8 @@
         </p:nvSpPr>
         <p:spPr>
           <a:xfrm>
-            <a:off x="4343400" y="4965192"/>
-            <a:ext cx="1664208" cy="201168"/>
+            <a:off x="4297678" y="4864608"/>
+            <a:ext cx="1709927" cy="201168"/>
           </a:xfrm>
           <a:prstGeom prst="rect">
             <a:avLst/>
@@ -4194,7 +4245,7 @@
                 <a:latin typeface="Microsoft YaHei"/>
                 <a:ea typeface="Microsoft YaHei"/>
               </a:rPr>
-              <a:t>生产可用前提：六维安全…</a:t>
+              <a:t>形态</a:t>
             </a:r>
           </a:p>
         </p:txBody>
@@ -4207,8 +4258,8 @@
         </p:nvSpPr>
         <p:spPr>
           <a:xfrm>
-            <a:off x="4343400" y="5166360"/>
-            <a:ext cx="1664208" cy="237744"/>
+            <a:off x="4297678" y="5065776"/>
+            <a:ext cx="1709927" cy="256032"/>
           </a:xfrm>
           <a:prstGeom prst="rect">
             <a:avLst/>
@@ -4230,7 +4281,7 @@
                 <a:latin typeface="Microsoft YaHei"/>
                 <a:ea typeface="Microsoft YaHei"/>
               </a:rPr>
-              <a:t>网络默认：无公网出口</a:t>
+              <a:t>演讲口径</a:t>
             </a:r>
           </a:p>
         </p:txBody>
@@ -4243,8 +4294,8 @@
         </p:nvSpPr>
         <p:spPr>
           <a:xfrm>
-            <a:off x="4343400" y="5413248"/>
-            <a:ext cx="1664208" cy="292608"/>
+            <a:off x="4297678" y="5340096"/>
+            <a:ext cx="1709927" cy="365760"/>
           </a:xfrm>
           <a:prstGeom prst="rect">
             <a:avLst/>
@@ -4259,14 +4310,14 @@
           <a:p>
             <a:pPr algn="l"/>
             <a:r>
-              <a:rPr sz="1400" b="1">
+              <a:rPr sz="1200" b="1">
                 <a:solidFill>
                   <a:srgbClr val="8B1A2B"/>
                 </a:solidFill>
                 <a:latin typeface="Microsoft YaHei"/>
                 <a:ea typeface="Microsoft YaHei"/>
               </a:rPr>
-              <a:t>会话模型：1 函数实例 : 1 会…</a:t>
+              <a:t>Serverless 免运维 + MicroVM 运行时</a:t>
             </a:r>
           </a:p>
         </p:txBody>
@@ -4279,8 +4330,8 @@
         </p:nvSpPr>
         <p:spPr>
           <a:xfrm>
-            <a:off x="6190488" y="4910328"/>
-            <a:ext cx="1847088" cy="868680"/>
+            <a:off x="6172197" y="4809744"/>
+            <a:ext cx="1874519" cy="960120"/>
           </a:xfrm>
           <a:prstGeom prst="rect">
             <a:avLst/>
@@ -4324,8 +4375,8 @@
         </p:nvSpPr>
         <p:spPr>
           <a:xfrm>
-            <a:off x="6300216" y="4965192"/>
-            <a:ext cx="1664208" cy="201168"/>
+            <a:off x="6263637" y="4864608"/>
+            <a:ext cx="1709927" cy="201168"/>
           </a:xfrm>
           <a:prstGeom prst="rect">
             <a:avLst/>
@@ -4347,7 +4398,7 @@
                 <a:latin typeface="Microsoft YaHei"/>
                 <a:ea typeface="Microsoft YaHei"/>
               </a:rPr>
-              <a:t>浅休眠 + 深休眠 +…</a:t>
+              <a:t>生态</a:t>
             </a:r>
           </a:p>
         </p:txBody>
@@ -4360,8 +4411,8 @@
         </p:nvSpPr>
         <p:spPr>
           <a:xfrm>
-            <a:off x="6300216" y="5166360"/>
-            <a:ext cx="1664208" cy="237744"/>
+            <a:off x="6263637" y="5065776"/>
+            <a:ext cx="1709927" cy="256032"/>
           </a:xfrm>
           <a:prstGeom prst="rect">
             <a:avLst/>
@@ -4383,7 +4434,7 @@
                 <a:latin typeface="Microsoft YaHei"/>
                 <a:ea typeface="Microsoft YaHei"/>
               </a:rPr>
-              <a:t>深休眠：~70% 降本，唤醒 …</a:t>
+              <a:t>演讲口径</a:t>
             </a:r>
           </a:p>
         </p:txBody>
@@ -4396,8 +4447,8 @@
         </p:nvSpPr>
         <p:spPr>
           <a:xfrm>
-            <a:off x="6300216" y="5413248"/>
-            <a:ext cx="1664208" cy="292608"/>
+            <a:off x="6263637" y="5340096"/>
+            <a:ext cx="1709927" cy="365760"/>
           </a:xfrm>
           <a:prstGeom prst="rect">
             <a:avLst/>
@@ -4412,14 +4463,14 @@
           <a:p>
             <a:pPr algn="l"/>
             <a:r>
-              <a:rPr sz="1400" b="1">
+              <a:rPr sz="1200" b="1">
                 <a:solidFill>
                   <a:srgbClr val="8B1A2B"/>
                 </a:solidFill>
                 <a:latin typeface="Microsoft YaHei"/>
                 <a:ea typeface="Microsoft YaHei"/>
               </a:rPr>
-              <a:t>深休眠：~70% 降本，唤醒 &lt;1s</a:t>
+              <a:t>E2B SDK / OpenAPI / MCP</a:t>
             </a:r>
           </a:p>
         </p:txBody>
@@ -4432,8 +4483,8 @@
         </p:nvSpPr>
         <p:spPr>
           <a:xfrm>
-            <a:off x="8147304" y="4910328"/>
-            <a:ext cx="1847088" cy="868680"/>
+            <a:off x="8138156" y="4809744"/>
+            <a:ext cx="1874519" cy="960120"/>
           </a:xfrm>
           <a:prstGeom prst="rect">
             <a:avLst/>
@@ -4477,8 +4528,8 @@
         </p:nvSpPr>
         <p:spPr>
           <a:xfrm>
-            <a:off x="8257032" y="4965192"/>
-            <a:ext cx="1664208" cy="201168"/>
+            <a:off x="8229596" y="4864608"/>
+            <a:ext cx="1709927" cy="201168"/>
           </a:xfrm>
           <a:prstGeom prst="rect">
             <a:avLst/>
@@ -4500,7 +4551,7 @@
                 <a:latin typeface="Microsoft YaHei"/>
                 <a:ea typeface="Microsoft YaHei"/>
               </a:rPr>
-              <a:t>大规模并发：多级缓存与…</a:t>
+              <a:t>会话模型</a:t>
             </a:r>
           </a:p>
         </p:txBody>
@@ -4513,8 +4564,8 @@
         </p:nvSpPr>
         <p:spPr>
           <a:xfrm>
-            <a:off x="8257032" y="5166360"/>
-            <a:ext cx="1664208" cy="237744"/>
+            <a:off x="8229596" y="5065776"/>
+            <a:ext cx="1709927" cy="256032"/>
           </a:xfrm>
           <a:prstGeom prst="rect">
             <a:avLst/>
@@ -4536,7 +4587,7 @@
                 <a:latin typeface="Microsoft YaHei"/>
                 <a:ea typeface="Microsoft YaHei"/>
               </a:rPr>
-              <a:t>P99：冷 &lt;180ms；热 …</a:t>
+              <a:t>演讲口径</a:t>
             </a:r>
           </a:p>
         </p:txBody>
@@ -4549,8 +4600,8 @@
         </p:nvSpPr>
         <p:spPr>
           <a:xfrm>
-            <a:off x="8257032" y="5413248"/>
-            <a:ext cx="1664208" cy="292608"/>
+            <a:off x="8229596" y="5340096"/>
+            <a:ext cx="1709927" cy="365760"/>
           </a:xfrm>
           <a:prstGeom prst="rect">
             <a:avLst/>
@@ -4565,14 +4616,14 @@
           <a:p>
             <a:pPr algn="l"/>
             <a:r>
-              <a:rPr sz="1400" b="1">
+              <a:rPr sz="1200" b="1">
                 <a:solidFill>
                   <a:srgbClr val="8B1A2B"/>
                 </a:solidFill>
                 <a:latin typeface="Microsoft YaHei"/>
                 <a:ea typeface="Microsoft YaHei"/>
               </a:rPr>
-              <a:t>创建吞吐：100,000/分钟；规…</a:t>
+              <a:t>1 函数实例 : 1 会话，结束即销毁</a:t>
             </a:r>
           </a:p>
         </p:txBody>
@@ -4585,8 +4636,8 @@
         </p:nvSpPr>
         <p:spPr>
           <a:xfrm>
-            <a:off x="10104120" y="4910328"/>
-            <a:ext cx="1847088" cy="868680"/>
+            <a:off x="10104115" y="4809744"/>
+            <a:ext cx="1874519" cy="960120"/>
           </a:xfrm>
           <a:prstGeom prst="rect">
             <a:avLst/>
@@ -4630,8 +4681,8 @@
         </p:nvSpPr>
         <p:spPr>
           <a:xfrm>
-            <a:off x="10213848" y="4965192"/>
-            <a:ext cx="1664208" cy="201168"/>
+            <a:off x="10195555" y="4864608"/>
+            <a:ext cx="1709927" cy="201168"/>
           </a:xfrm>
           <a:prstGeom prst="rect">
             <a:avLst/>
@@ -4653,7 +4704,7 @@
                 <a:latin typeface="Microsoft YaHei"/>
                 <a:ea typeface="Microsoft YaHei"/>
               </a:rPr>
-              <a:t>千问办公五条硬要求与三…</a:t>
+              <a:t>网络默认</a:t>
             </a:r>
           </a:p>
         </p:txBody>
@@ -4666,8 +4717,8 @@
         </p:nvSpPr>
         <p:spPr>
           <a:xfrm>
-            <a:off x="10213848" y="5166360"/>
-            <a:ext cx="1664208" cy="237744"/>
+            <a:off x="10195555" y="5065776"/>
+            <a:ext cx="1709927" cy="256032"/>
           </a:xfrm>
           <a:prstGeom prst="rect">
             <a:avLst/>
@@ -4689,7 +4740,7 @@
                 <a:latin typeface="Microsoft YaHei"/>
                 <a:ea typeface="Microsoft YaHei"/>
               </a:rPr>
-              <a:t>选型结论：能力要拿满，Infr…</a:t>
+              <a:t>演讲口径</a:t>
             </a:r>
           </a:p>
         </p:txBody>
@@ -4702,8 +4753,8 @@
         </p:nvSpPr>
         <p:spPr>
           <a:xfrm>
-            <a:off x="10213848" y="5413248"/>
-            <a:ext cx="1664208" cy="292608"/>
+            <a:off x="10195555" y="5340096"/>
+            <a:ext cx="1709927" cy="365760"/>
           </a:xfrm>
           <a:prstGeom prst="rect">
             <a:avLst/>
@@ -4718,14 +4769,14 @@
           <a:p>
             <a:pPr algn="l"/>
             <a:r>
-              <a:rPr sz="1400" b="1">
+              <a:rPr sz="1200" b="1">
                 <a:solidFill>
                   <a:srgbClr val="8B1A2B"/>
                 </a:solidFill>
                 <a:latin typeface="Microsoft YaHei"/>
                 <a:ea typeface="Microsoft YaHei"/>
               </a:rPr>
-              <a:t>目标规模：千万级用户与海量并发任务</a:t>
+              <a:t>无公网出口</a:t>
             </a:r>
           </a:p>
         </p:txBody>
@@ -4738,8 +4789,8 @@
         </p:nvSpPr>
         <p:spPr>
           <a:xfrm>
-            <a:off x="0" y="5989320"/>
-            <a:ext cx="12191695" cy="868680"/>
+            <a:off x="0" y="5870448"/>
+            <a:ext cx="12191695" cy="987552"/>
           </a:xfrm>
           <a:prstGeom prst="rect">
             <a:avLst/>
@@ -4781,8 +4832,8 @@
         </p:nvSpPr>
         <p:spPr>
           <a:xfrm>
-            <a:off x="365760" y="6080760"/>
-            <a:ext cx="11430000" cy="256032"/>
+            <a:off x="320040" y="5943600"/>
+            <a:ext cx="11521440" cy="502920"/>
           </a:xfrm>
           <a:prstGeom prst="rect">
             <a:avLst/>
@@ -4797,14 +4848,14 @@
           <a:p>
             <a:pPr algn="l"/>
             <a:r>
-              <a:rPr sz="1200" b="1">
+              <a:rPr sz="1100" b="1">
                 <a:solidFill>
                   <a:srgbClr val="1A1A1A"/>
                 </a:solidFill>
                 <a:latin typeface="Microsoft YaHei"/>
                 <a:ea typeface="Microsoft YaHei"/>
               </a:rPr>
-              <a:t>可落地动作：按 Use/In/RL 三类负载设计沙箱规格、休眠策略与计费，是支撑百万至千万级办公 Agent 的前提。；极速版对标能力：E2B 兼容、MicroVM 六维隔离、浅/深休眠+快照、多级镜像缓存与网卡收敛，构成 HCS 与阿里云竞争力差距…</a:t>
+              <a:t>可落地动作：按 Use/In/RL 三类负载设计沙箱规格、休眠策略与计费，是支撑百万至千万级办公 Agent 的前提；极速版对标能力：E2B 兼容、MicroVM 六维隔离、浅/深休眠+快照、多级镜像缓存与网卡收敛，构成 HCS 与阿里云竞争力差距的可量化清单；千问办公验证了「托管拿能力、专属云保数据主权」路径；HCS 应以此讲清相对公有第三方沙箱与客户自建的差异化，并补预热池、凭证替换、跨地域容灾。</a:t>
             </a:r>
           </a:p>
         </p:txBody>
@@ -4817,8 +4868,8 @@
         </p:nvSpPr>
         <p:spPr>
           <a:xfrm>
-            <a:off x="365760" y="6373368"/>
-            <a:ext cx="11430000" cy="256032"/>
+            <a:off x="320040" y="6437376"/>
+            <a:ext cx="11521440" cy="256032"/>
           </a:xfrm>
           <a:prstGeom prst="rect">
             <a:avLst/>
@@ -4833,7 +4884,7 @@
           <a:p>
             <a:pPr algn="l"/>
             <a:r>
-              <a:rPr sz="1000" b="0">
+              <a:rPr sz="900" b="0">
                 <a:solidFill>
                   <a:srgbClr val="6B6B6B"/>
                 </a:solidFill>
@@ -5075,7 +5126,7 @@
         <p:spPr>
           <a:xfrm>
             <a:off x="429768" y="1143000"/>
-            <a:ext cx="3496970" cy="292608"/>
+            <a:ext cx="3496970" cy="384048"/>
           </a:xfrm>
           <a:prstGeom prst="rect">
             <a:avLst/>
@@ -5097,7 +5148,7 @@
                 <a:latin typeface="Microsoft YaHei"/>
                 <a:ea typeface="Microsoft YaHei"/>
               </a:rPr>
-              <a:t>结论：任一短板都会成为企业 Age…</a:t>
+              <a:t>关键指标：创建速度、并发容量、状态保活/恢复、强隔离、单位成本 · 结论：任一短板都会成为企业 Agent 平台规模化瓶颈</a:t>
             </a:r>
           </a:p>
         </p:txBody>
@@ -5118,7 +5169,7 @@
         </p:blipFill>
         <p:spPr>
           <a:xfrm>
-            <a:off x="429768" y="1928092"/>
+            <a:off x="429768" y="1946380"/>
             <a:ext cx="3496970" cy="2965239"/>
           </a:xfrm>
           <a:prstGeom prst="rect">
@@ -5216,7 +5267,7 @@
         <p:spPr>
           <a:xfrm>
             <a:off x="4347362" y="1143000"/>
-            <a:ext cx="3496970" cy="292608"/>
+            <a:ext cx="3496970" cy="384048"/>
           </a:xfrm>
           <a:prstGeom prst="rect">
             <a:avLst/>
@@ -5238,7 +5289,7 @@
                 <a:latin typeface="Microsoft YaHei"/>
                 <a:ea typeface="Microsoft YaHei"/>
               </a:rPr>
-              <a:t>生态：E2B SDK / Open…</a:t>
+              <a:t>形态：Serverless 免运维 + MicroVM 运行时 · 生态：E2B SDK / OpenAPI / MCP</a:t>
             </a:r>
           </a:p>
         </p:txBody>
@@ -5259,7 +5310,7 @@
         </p:blipFill>
         <p:spPr>
           <a:xfrm>
-            <a:off x="4347362" y="1928092"/>
+            <a:off x="4347362" y="1946380"/>
             <a:ext cx="3496970" cy="2965239"/>
           </a:xfrm>
           <a:prstGeom prst="rect">
@@ -5357,7 +5408,7 @@
         <p:spPr>
           <a:xfrm>
             <a:off x="8264956" y="1143000"/>
-            <a:ext cx="3496970" cy="292608"/>
+            <a:ext cx="3496970" cy="384048"/>
           </a:xfrm>
           <a:prstGeom prst="rect">
             <a:avLst/>
@@ -5379,7 +5430,7 @@
                 <a:latin typeface="Microsoft YaHei"/>
                 <a:ea typeface="Microsoft YaHei"/>
               </a:rPr>
-              <a:t>会话模型：1 函数实例 : 1 会…</a:t>
+              <a:t>会话模型：1 函数实例 : 1 会话，结束即销毁 · 网络默认：无公网出口</a:t>
             </a:r>
           </a:p>
         </p:txBody>
@@ -5400,7 +5451,7 @@
         </p:blipFill>
         <p:spPr>
           <a:xfrm>
-            <a:off x="8264956" y="1928092"/>
+            <a:off x="8264956" y="1946380"/>
             <a:ext cx="3496970" cy="2965239"/>
           </a:xfrm>
           <a:prstGeom prst="rect">

--- a/yunqi-2026-agenda-201/docs/洞察一页-03-驾驭百万级 Agent：Sandbox 核心能力与千问办.pptx
+++ b/yunqi-2026-agenda-201/docs/洞察一页-03-驾驭百万级 Agent：Sandbox 核心能力与千问办.pptx
@@ -3323,7 +3323,7 @@
                 <a:latin typeface="Microsoft YaHei"/>
                 <a:ea typeface="Microsoft YaHei"/>
               </a:rPr>
-              <a:t>一句话判断：本场前半由卢萌凯拆解 Agent Sandbox 三类核心负载（Use 短生命周期工具、In 长会话分身、RL/Eval 十万级并发）及极速版架构：E2B 兼容、MicroVM 六维隔离、浅/深休眠与快照降本、多级缓存冲击百万级并发。</a:t>
+              <a:t>一句话判断：阿里云 Agent Sandbox——E2B 兼容、MicroVM 六维隔离、浅/深休眠与快照降本、多级缓存冲击百万级并发。</a:t>
             </a:r>
           </a:p>
         </p:txBody>
@@ -3444,7 +3444,7 @@
                 <a:latin typeface="Microsoft YaHei"/>
                 <a:ea typeface="Microsoft YaHei"/>
               </a:rPr>
-              <a:t>HCS 沙箱产品应按三类负载定义不同规格与计费（瞬时工具型、长会话休眠型、评测高并发型），避免一套 Pod 规格打天下</a:t>
+              <a:t>沙箱产品应按三类负载定义不同规格与计费（瞬时工具型、长会话休眠型、评测高并发型），避免一套 Pod 规格打天下</a:t>
             </a:r>
           </a:p>
           <a:p>
@@ -3939,7 +3939,7 @@
                 <a:latin typeface="Microsoft YaHei"/>
                 <a:ea typeface="Microsoft YaHei"/>
               </a:rPr>
-              <a:t>关键指标</a:t>
+              <a:t>深休眠</a:t>
             </a:r>
           </a:p>
         </p:txBody>
@@ -3975,7 +3975,7 @@
                 <a:latin typeface="Microsoft YaHei"/>
                 <a:ea typeface="Microsoft YaHei"/>
               </a:rPr>
-              <a:t>演讲口径</a:t>
+              <a:t>浅休眠 + 深休眠 + 快照深度降本</a:t>
             </a:r>
           </a:p>
         </p:txBody>
@@ -4011,7 +4011,7 @@
                 <a:latin typeface="Microsoft YaHei"/>
                 <a:ea typeface="Microsoft YaHei"/>
               </a:rPr>
-              <a:t>创建速度、并发容量、状态保活/恢复、强隔离、单位成本</a:t>
+              <a:t>~70% 降本，唤醒 &lt;1s</a:t>
             </a:r>
           </a:p>
         </p:txBody>
@@ -4092,7 +4092,7 @@
                 <a:latin typeface="Microsoft YaHei"/>
                 <a:ea typeface="Microsoft YaHei"/>
               </a:rPr>
-              <a:t>结论</a:t>
+              <a:t>浅休眠</a:t>
             </a:r>
           </a:p>
         </p:txBody>
@@ -4128,7 +4128,7 @@
                 <a:latin typeface="Microsoft YaHei"/>
                 <a:ea typeface="Microsoft YaHei"/>
               </a:rPr>
-              <a:t>演讲口径</a:t>
+              <a:t>浅休眠 + 深休眠 + 快照深度降本</a:t>
             </a:r>
           </a:p>
         </p:txBody>
@@ -4164,7 +4164,7 @@
                 <a:latin typeface="Microsoft YaHei"/>
                 <a:ea typeface="Microsoft YaHei"/>
               </a:rPr>
-              <a:t>任一短板都会成为企业 Agent 平台规模化瓶颈</a:t>
+              <a:t>~50% 降本，唤醒 ~1ms</a:t>
             </a:r>
           </a:p>
         </p:txBody>
@@ -4245,7 +4245,7 @@
                 <a:latin typeface="Microsoft YaHei"/>
                 <a:ea typeface="Microsoft YaHei"/>
               </a:rPr>
-              <a:t>形态</a:t>
+              <a:t>创建吞吐</a:t>
             </a:r>
           </a:p>
         </p:txBody>
@@ -4281,7 +4281,7 @@
                 <a:latin typeface="Microsoft YaHei"/>
                 <a:ea typeface="Microsoft YaHei"/>
               </a:rPr>
-              <a:t>演讲口径</a:t>
+              <a:t>多级缓存与亲和调度</a:t>
             </a:r>
           </a:p>
         </p:txBody>
@@ -4317,7 +4317,7 @@
                 <a:latin typeface="Microsoft YaHei"/>
                 <a:ea typeface="Microsoft YaHei"/>
               </a:rPr>
-              <a:t>Serverless 免运维 + MicroVM 运行时</a:t>
+              <a:t>100,000/分钟；规模：百万级/Region</a:t>
             </a:r>
           </a:p>
         </p:txBody>
@@ -4398,7 +4398,7 @@
                 <a:latin typeface="Microsoft YaHei"/>
                 <a:ea typeface="Microsoft YaHei"/>
               </a:rPr>
-              <a:t>生态</a:t>
+              <a:t>预热池秒级创建与分层隔离（真凭证不进沙箱）</a:t>
             </a:r>
           </a:p>
         </p:txBody>
@@ -4434,7 +4434,7 @@
                 <a:latin typeface="Microsoft YaHei"/>
                 <a:ea typeface="Microsoft YaHei"/>
               </a:rPr>
-              <a:t>演讲口径</a:t>
+              <a:t>创建等待：数十秒</a:t>
             </a:r>
           </a:p>
         </p:txBody>
@@ -4470,7 +4470,7 @@
                 <a:latin typeface="Microsoft YaHei"/>
                 <a:ea typeface="Microsoft YaHei"/>
               </a:rPr>
-              <a:t>E2B SDK / OpenAPI / MCP</a:t>
+              <a:t>一秒级</a:t>
             </a:r>
           </a:p>
         </p:txBody>
@@ -4551,7 +4551,7 @@
                 <a:latin typeface="Microsoft YaHei"/>
                 <a:ea typeface="Microsoft YaHei"/>
               </a:rPr>
-              <a:t>会话模型</a:t>
+              <a:t>网络默认</a:t>
             </a:r>
           </a:p>
         </p:txBody>
@@ -4587,7 +4587,7 @@
                 <a:latin typeface="Microsoft YaHei"/>
                 <a:ea typeface="Microsoft YaHei"/>
               </a:rPr>
-              <a:t>演讲口径</a:t>
+              <a:t>六维安全隔离</a:t>
             </a:r>
           </a:p>
         </p:txBody>
@@ -4623,7 +4623,7 @@
                 <a:latin typeface="Microsoft YaHei"/>
                 <a:ea typeface="Microsoft YaHei"/>
               </a:rPr>
-              <a:t>1 函数实例 : 1 会话，结束即销毁</a:t>
+              <a:t>无公网出口</a:t>
             </a:r>
           </a:p>
         </p:txBody>
@@ -4704,7 +4704,7 @@
                 <a:latin typeface="Microsoft YaHei"/>
                 <a:ea typeface="Microsoft YaHei"/>
               </a:rPr>
-              <a:t>网络默认</a:t>
+              <a:t>目标规模</a:t>
             </a:r>
           </a:p>
         </p:txBody>
@@ -4740,7 +4740,7 @@
                 <a:latin typeface="Microsoft YaHei"/>
                 <a:ea typeface="Microsoft YaHei"/>
               </a:rPr>
-              <a:t>演讲口径</a:t>
+              <a:t>千问办公五条硬要求与三条选型路径</a:t>
             </a:r>
           </a:p>
         </p:txBody>
@@ -4776,7 +4776,7 @@
                 <a:latin typeface="Microsoft YaHei"/>
                 <a:ea typeface="Microsoft YaHei"/>
               </a:rPr>
-              <a:t>无公网出口</a:t>
+              <a:t>千万级用户与海量并发任务</a:t>
             </a:r>
           </a:p>
         </p:txBody>
@@ -4855,7 +4855,7 @@
                 <a:latin typeface="Microsoft YaHei"/>
                 <a:ea typeface="Microsoft YaHei"/>
               </a:rPr>
-              <a:t>可落地动作：按 Use/In/RL 三类负载设计沙箱规格、休眠策略与计费，是支撑百万至千万级办公 Agent 的前提；极速版对标能力：E2B 兼容、MicroVM 六维隔离、浅/深休眠+快照、多级镜像缓存与网卡收敛，构成 HCS 与阿里云竞争力差距的可量化清单；千问办公验证了「托管拿能力、专属云保数据主权」路径；HCS 应以此讲清相对公有第三方沙箱与客户自建的差异化，并补预热池、凭证替换、跨地域容灾。</a:t>
+              <a:t>启示要点：按 Use/In/RL 三类负载设计沙箱规格、休眠策略与计费，是支撑百万至千万级办公 Agent 的前提；极速版对标能力：E2B 兼容、MicroVM 六维隔离、浅/深休眠+快照、多级镜像缓存与网卡收敛，构成 与阿里云竞争力差距的可量化清单；千问办公验证了「托管拿能力、专属云保数据主权」路径； 应以此讲清相对公有第三方沙箱与客户自建的差异化，并补预热池、凭证替换、跨地域容灾。</a:t>
             </a:r>
           </a:p>
         </p:txBody>
@@ -4891,7 +4891,7 @@
                 <a:latin typeface="Microsoft YaHei"/>
                 <a:ea typeface="Microsoft YaHei"/>
               </a:rPr>
-              <a:t>来源：https://yunqi.aliyun.com/2026/session?agendaId=201 · Talk 03 卢萌凯 / 严龙  ·  视角：HCS 技术规划</a:t>
+              <a:t>来源：https://yunqi.aliyun.com/2026/session?agendaId=201 · Talk 03 卢萌凯 / 严龙</a:t>
             </a:r>
           </a:p>
         </p:txBody>
